--- a/curso/pptx/S24.pptx
+++ b/curso/pptx/S24.pptx
@@ -6482,7 +6482,7 @@
                 </a:solidFill>
                 <a:latin typeface="Nunito Sans"/>
               </a:rPr>
-              <a:t>Pocos casos, pocas opciones, pasos sin razones</a:t>
+              <a:t>案例太少、选项太少、一步步推下去没有理由</a:t>
             </a:r>
           </a:p>
           <a:p>
@@ -6507,7 +6507,7 @@
                 </a:solidFill>
                 <a:latin typeface="Nunito Sans"/>
               </a:rPr>
-              <a:t>Causas inventadas, vacíos de pruebas y círculos</a:t>
+              <a:t>编造的原因、证据的空白和循环</a:t>
             </a:r>
           </a:p>
         </p:txBody>
@@ -7547,7 +7547,7 @@
                 </a:solidFill>
                 <a:latin typeface="Nunito Sans"/>
               </a:rPr>
-              <a:t>Uno o dos casos → «todos»</a:t>
+              <a:t>一两个案例 → “所有”</a:t>
             </a:r>
           </a:p>
           <a:p>
@@ -7572,7 +7572,7 @@
                 </a:solidFill>
                 <a:latin typeface="Nunito Sans"/>
               </a:rPr>
-              <a:t>Esconder las opciones del medio</a:t>
+              <a:t>隐藏中间的选项</a:t>
             </a:r>
           </a:p>
           <a:p>
@@ -7597,7 +7597,7 @@
                 </a:solidFill>
                 <a:latin typeface="Nunito Sans"/>
               </a:rPr>
-              <a:t>Cadena de pasos sin razones</a:t>
+              <a:t>一连串步骤，没有理由</a:t>
             </a:r>
           </a:p>
           <a:p>
@@ -7622,7 +7622,7 @@
                 </a:solidFill>
                 <a:latin typeface="Nunito Sans"/>
               </a:rPr>
-              <a:t>«Después de» → «por culpa de»</a:t>
+              <a:t>“在这之后” → “因为这个”</a:t>
             </a:r>
           </a:p>
         </p:txBody>
@@ -7752,7 +7752,7 @@
                 </a:solidFill>
                 <a:latin typeface="Nunito Sans"/>
               </a:rPr>
-              <a:t>Muchos casos variados → «la mayoría»</a:t>
+              <a:t>很多不同的案例 → “大多数”</a:t>
             </a:r>
           </a:p>
           <a:p>
@@ -7777,7 +7777,7 @@
                 </a:solidFill>
                 <a:latin typeface="Nunito Sans"/>
               </a:rPr>
-              <a:t>Dos opciones que de verdad son las únicas</a:t>
+              <a:t>两个选项真的是仅有的选项</a:t>
             </a:r>
           </a:p>
           <a:p>
@@ -7802,7 +7802,7 @@
                 </a:solidFill>
                 <a:latin typeface="Nunito Sans"/>
               </a:rPr>
-              <a:t>Consecuencias con razones en cada paso</a:t>
+              <a:t>每一步都有理由的后果</a:t>
             </a:r>
           </a:p>
           <a:p>
@@ -7827,7 +7827,7 @@
                 </a:solidFill>
                 <a:latin typeface="Nunito Sans"/>
               </a:rPr>
-              <a:t>Causa comprobada varias veces y explicada</a:t>
+              <a:t>多次检验过并且有解释的原因</a:t>
             </a:r>
           </a:p>
         </p:txBody>
